--- a/FSST/Heap-Sort/presentation white.pptx
+++ b/FSST/Heap-Sort/presentation white.pptx
@@ -321,7 +321,7 @@
           <a:p>
             <a:fld id="{0C4AEE9A-CAF4-434E-8414-82CBDC6C7854}" type="datetimeFigureOut">
               <a:rPr lang="en-US" smtClean="0"/>
-              <a:t>10/7/26</a:t>
+              <a:t>10/13/26</a:t>
             </a:fld>
             <a:endParaRPr lang="en-US"/>
           </a:p>
@@ -664,7 +664,7 @@
           <a:p>
             <a:fld id="{0C4AEE9A-CAF4-434E-8414-82CBDC6C7854}" type="datetimeFigureOut">
               <a:rPr lang="en-US" smtClean="0"/>
-              <a:t>10/7/26</a:t>
+              <a:t>10/13/26</a:t>
             </a:fld>
             <a:endParaRPr lang="en-US"/>
           </a:p>
@@ -943,7 +943,7 @@
           <a:p>
             <a:fld id="{0C4AEE9A-CAF4-434E-8414-82CBDC6C7854}" type="datetimeFigureOut">
               <a:rPr lang="en-US" smtClean="0"/>
-              <a:t>10/7/26</a:t>
+              <a:t>10/13/26</a:t>
             </a:fld>
             <a:endParaRPr lang="en-US"/>
           </a:p>
@@ -1175,7 +1175,7 @@
           <a:p>
             <a:fld id="{0C4AEE9A-CAF4-434E-8414-82CBDC6C7854}" type="datetimeFigureOut">
               <a:rPr lang="en-US" smtClean="0"/>
-              <a:t>10/7/26</a:t>
+              <a:t>10/13/26</a:t>
             </a:fld>
             <a:endParaRPr lang="en-US"/>
           </a:p>
@@ -1463,7 +1463,7 @@
           <a:p>
             <a:fld id="{0C4AEE9A-CAF4-434E-8414-82CBDC6C7854}" type="datetimeFigureOut">
               <a:rPr lang="en-US" smtClean="0"/>
-              <a:t>10/7/26</a:t>
+              <a:t>10/13/26</a:t>
             </a:fld>
             <a:endParaRPr lang="en-US"/>
           </a:p>
@@ -1751,7 +1751,7 @@
           <a:p>
             <a:fld id="{0C4AEE9A-CAF4-434E-8414-82CBDC6C7854}" type="datetimeFigureOut">
               <a:rPr lang="en-US" smtClean="0"/>
-              <a:t>10/7/26</a:t>
+              <a:t>10/13/26</a:t>
             </a:fld>
             <a:endParaRPr lang="en-US"/>
           </a:p>
@@ -2157,7 +2157,7 @@
           <a:p>
             <a:fld id="{0C4AEE9A-CAF4-434E-8414-82CBDC6C7854}" type="datetimeFigureOut">
               <a:rPr lang="en-US" smtClean="0"/>
-              <a:t>10/7/26</a:t>
+              <a:t>10/13/26</a:t>
             </a:fld>
             <a:endParaRPr lang="en-US"/>
           </a:p>
@@ -2449,7 +2449,7 @@
           <a:p>
             <a:fld id="{0C4AEE9A-CAF4-434E-8414-82CBDC6C7854}" type="datetimeFigureOut">
               <a:rPr lang="en-US" smtClean="0"/>
-              <a:t>10/7/26</a:t>
+              <a:t>10/13/26</a:t>
             </a:fld>
             <a:endParaRPr lang="en-US"/>
           </a:p>
@@ -2722,7 +2722,7 @@
           <a:p>
             <a:fld id="{0C4AEE9A-CAF4-434E-8414-82CBDC6C7854}" type="datetimeFigureOut">
               <a:rPr lang="en-US" smtClean="0"/>
-              <a:t>10/7/26</a:t>
+              <a:t>10/13/26</a:t>
             </a:fld>
             <a:endParaRPr lang="en-US"/>
           </a:p>
@@ -2991,7 +2991,7 @@
           <a:p>
             <a:fld id="{0C4AEE9A-CAF4-434E-8414-82CBDC6C7854}" type="datetimeFigureOut">
               <a:rPr lang="en-US" smtClean="0"/>
-              <a:t>10/7/26</a:t>
+              <a:t>10/13/26</a:t>
             </a:fld>
             <a:endParaRPr lang="en-US"/>
           </a:p>
@@ -3222,7 +3222,7 @@
           <a:p>
             <a:fld id="{0C4AEE9A-CAF4-434E-8414-82CBDC6C7854}" type="datetimeFigureOut">
               <a:rPr lang="en-US" smtClean="0"/>
-              <a:t>10/7/26</a:t>
+              <a:t>10/13/26</a:t>
             </a:fld>
             <a:endParaRPr lang="en-US"/>
           </a:p>
@@ -3442,7 +3442,7 @@
           <a:p>
             <a:fld id="{0C4AEE9A-CAF4-434E-8414-82CBDC6C7854}" type="datetimeFigureOut">
               <a:rPr lang="en-US" smtClean="0"/>
-              <a:t>10/7/26</a:t>
+              <a:t>10/13/26</a:t>
             </a:fld>
             <a:endParaRPr lang="en-US"/>
           </a:p>
@@ -3694,7 +3694,7 @@
           <a:p>
             <a:fld id="{0C4AEE9A-CAF4-434E-8414-82CBDC6C7854}" type="datetimeFigureOut">
               <a:rPr lang="en-US" smtClean="0"/>
-              <a:t>10/7/26</a:t>
+              <a:t>10/13/26</a:t>
             </a:fld>
             <a:endParaRPr lang="en-US"/>
           </a:p>
@@ -3905,7 +3905,7 @@
           <a:p>
             <a:fld id="{0C4AEE9A-CAF4-434E-8414-82CBDC6C7854}" type="datetimeFigureOut">
               <a:rPr lang="en-US" smtClean="0"/>
-              <a:t>10/7/26</a:t>
+              <a:t>10/13/26</a:t>
             </a:fld>
             <a:endParaRPr lang="en-US"/>
           </a:p>
@@ -4185,7 +4185,7 @@
           <a:p>
             <a:fld id="{0C4AEE9A-CAF4-434E-8414-82CBDC6C7854}" type="datetimeFigureOut">
               <a:rPr lang="en-US" smtClean="0"/>
-              <a:t>10/7/26</a:t>
+              <a:t>10/13/26</a:t>
             </a:fld>
             <a:endParaRPr lang="en-US"/>
           </a:p>
@@ -4617,7 +4617,7 @@
           <a:p>
             <a:fld id="{0C4AEE9A-CAF4-434E-8414-82CBDC6C7854}" type="datetimeFigureOut">
               <a:rPr lang="en-US" smtClean="0"/>
-              <a:t>10/7/26</a:t>
+              <a:t>10/13/26</a:t>
             </a:fld>
             <a:endParaRPr lang="en-US"/>
           </a:p>
@@ -4771,7 +4771,7 @@
           <a:p>
             <a:fld id="{0C4AEE9A-CAF4-434E-8414-82CBDC6C7854}" type="datetimeFigureOut">
               <a:rPr lang="en-US" smtClean="0"/>
-              <a:t>10/7/26</a:t>
+              <a:t>10/13/26</a:t>
             </a:fld>
             <a:endParaRPr lang="en-US"/>
           </a:p>
@@ -4884,7 +4884,7 @@
           <a:p>
             <a:fld id="{0C4AEE9A-CAF4-434E-8414-82CBDC6C7854}" type="datetimeFigureOut">
               <a:rPr lang="en-US" smtClean="0"/>
-              <a:t>10/7/26</a:t>
+              <a:t>10/13/26</a:t>
             </a:fld>
             <a:endParaRPr lang="en-US"/>
           </a:p>
@@ -5126,7 +5126,7 @@
           <a:p>
             <a:fld id="{0C4AEE9A-CAF4-434E-8414-82CBDC6C7854}" type="datetimeFigureOut">
               <a:rPr lang="en-US" smtClean="0"/>
-              <a:t>10/7/26</a:t>
+              <a:t>10/13/26</a:t>
             </a:fld>
             <a:endParaRPr lang="en-US"/>
           </a:p>
@@ -5370,7 +5370,7 @@
           <a:p>
             <a:fld id="{0C4AEE9A-CAF4-434E-8414-82CBDC6C7854}" type="datetimeFigureOut">
               <a:rPr lang="en-US" smtClean="0"/>
-              <a:t>10/7/26</a:t>
+              <a:t>10/13/26</a:t>
             </a:fld>
             <a:endParaRPr lang="en-US"/>
           </a:p>
@@ -5593,7 +5593,7 @@
           <a:p>
             <a:fld id="{0C4AEE9A-CAF4-434E-8414-82CBDC6C7854}" type="datetimeFigureOut">
               <a:rPr lang="en-US" smtClean="0"/>
-              <a:t>10/7/26</a:t>
+              <a:t>10/13/26</a:t>
             </a:fld>
             <a:endParaRPr lang="en-US"/>
           </a:p>
@@ -5916,7 +5916,7 @@
           <a:p>
             <a:fld id="{0C4AEE9A-CAF4-434E-8414-82CBDC6C7854}" type="datetimeFigureOut">
               <a:rPr lang="en-US" smtClean="0"/>
-              <a:t>10/7/26</a:t>
+              <a:t>10/13/26</a:t>
             </a:fld>
             <a:endParaRPr lang="en-US"/>
           </a:p>
@@ -6143,7 +6143,7 @@
           <a:p>
             <a:fld id="{0C4AEE9A-CAF4-434E-8414-82CBDC6C7854}" type="datetimeFigureOut">
               <a:rPr lang="en-US" smtClean="0"/>
-              <a:t>10/7/26</a:t>
+              <a:t>10/13/26</a:t>
             </a:fld>
             <a:endParaRPr lang="en-US"/>
           </a:p>
@@ -6327,7 +6327,7 @@
           <a:p>
             <a:fld id="{0C4AEE9A-CAF4-434E-8414-82CBDC6C7854}" type="datetimeFigureOut">
               <a:rPr lang="en-US" smtClean="0"/>
-              <a:t>10/7/26</a:t>
+              <a:t>10/13/26</a:t>
             </a:fld>
             <a:endParaRPr lang="en-US"/>
           </a:p>
@@ -6591,7 +6591,7 @@
           <a:p>
             <a:fld id="{0C4AEE9A-CAF4-434E-8414-82CBDC6C7854}" type="datetimeFigureOut">
               <a:rPr lang="en-US" smtClean="0"/>
-              <a:t>10/7/26</a:t>
+              <a:t>10/13/26</a:t>
             </a:fld>
             <a:endParaRPr lang="en-US"/>
           </a:p>
@@ -6939,7 +6939,7 @@
           <a:p>
             <a:fld id="{0C4AEE9A-CAF4-434E-8414-82CBDC6C7854}" type="datetimeFigureOut">
               <a:rPr lang="en-US" smtClean="0"/>
-              <a:t>10/7/26</a:t>
+              <a:t>10/13/26</a:t>
             </a:fld>
             <a:endParaRPr lang="en-US"/>
           </a:p>
@@ -7161,7 +7161,7 @@
           <a:p>
             <a:fld id="{0C4AEE9A-CAF4-434E-8414-82CBDC6C7854}" type="datetimeFigureOut">
               <a:rPr lang="en-US" smtClean="0"/>
-              <a:t>10/7/26</a:t>
+              <a:t>10/13/26</a:t>
             </a:fld>
             <a:endParaRPr lang="en-US"/>
           </a:p>
@@ -7378,7 +7378,7 @@
           <a:p>
             <a:fld id="{0C4AEE9A-CAF4-434E-8414-82CBDC6C7854}" type="datetimeFigureOut">
               <a:rPr lang="en-US" smtClean="0"/>
-              <a:t>10/7/26</a:t>
+              <a:t>10/13/26</a:t>
             </a:fld>
             <a:endParaRPr lang="en-US"/>
           </a:p>
@@ -7635,7 +7635,7 @@
           <a:p>
             <a:fld id="{0C4AEE9A-CAF4-434E-8414-82CBDC6C7854}" type="datetimeFigureOut">
               <a:rPr lang="en-US" smtClean="0"/>
-              <a:t>10/7/26</a:t>
+              <a:t>10/13/26</a:t>
             </a:fld>
             <a:endParaRPr lang="en-US"/>
           </a:p>
@@ -8382,15 +8382,7 @@
           <a:p>
             <a:r>
               <a:rPr lang="en-US" b="1" dirty="0"/>
-              <a:t>- Speicher: O(1) </a:t>
-            </a:r>
-            <a:r>
-              <a:rPr lang="en-US" b="1" dirty="0" err="1"/>
-              <a:t>zusätlicher</a:t>
-            </a:r>
-            <a:r>
-              <a:rPr lang="en-US" b="1" dirty="0"/>
-              <a:t> Speicher</a:t>
+              <a:t>- Speicher: O(1) In Place</a:t>
             </a:r>
           </a:p>
           <a:p>
@@ -8422,11 +8414,11 @@
             </a:r>
             <a:r>
               <a:rPr lang="en-US" dirty="0"/>
-              <a:t> in </a:t>
+              <a:t> </a:t>
             </a:r>
             <a:r>
               <a:rPr lang="en-US" dirty="0" err="1"/>
-              <a:t>Prioritätswarteschlangen</a:t>
+              <a:t>zum</a:t>
             </a:r>
             <a:r>
               <a:rPr lang="en-US" dirty="0"/>
@@ -8434,12 +8426,36 @@
             </a:r>
             <a:r>
               <a:rPr lang="en-US" dirty="0" err="1"/>
-              <a:t>benutzt</a:t>
+              <a:t>Sortieren</a:t>
             </a:r>
             <a:r>
               <a:rPr lang="en-US" dirty="0"/>
+              <a:t> von </a:t>
+            </a:r>
+            <a:r>
+              <a:rPr lang="en-US" dirty="0" err="1"/>
+              <a:t>großen</a:t>
+            </a:r>
+            <a:endParaRPr lang="en-US" dirty="0"/>
+          </a:p>
+          <a:p>
+            <a:r>
+              <a:rPr lang="en-US" dirty="0" err="1"/>
+              <a:t>Datenmengen</a:t>
+            </a:r>
+            <a:r>
+              <a:rPr lang="en-US" dirty="0"/>
+              <a:t> </a:t>
+            </a:r>
+            <a:r>
+              <a:rPr lang="en-US" dirty="0" err="1"/>
+              <a:t>verwendet</a:t>
+            </a:r>
+            <a:r>
+              <a:rPr lang="en-US"/>
               <a:t>.</a:t>
             </a:r>
+            <a:endParaRPr lang="en-US" dirty="0"/>
           </a:p>
           <a:p>
             <a:endParaRPr lang="en-US" dirty="0"/>
@@ -10833,8 +10849,8 @@
           </a:p>
         </p:txBody>
       </p:sp>
-      <mc:AlternateContent xmlns:mc="http://schemas.openxmlformats.org/markup-compatibility/2006" xmlns:a14="http://schemas.microsoft.com/office/drawing/2010/main">
-        <mc:Choice Requires="a14">
+      <mc:AlternateContent xmlns:mc="http://schemas.openxmlformats.org/markup-compatibility/2006">
+        <mc:Choice xmlns:a14="http://schemas.microsoft.com/office/drawing/2010/main" Requires="a14">
           <p:sp>
             <p:nvSpPr>
               <p:cNvPr id="2" name="Subtitle 2">
@@ -11209,7 +11225,7 @@
                         <a:latin typeface="Cambria Math" panose="02040503050406030204" pitchFamily="18" charset="0"/>
                         <a:ea typeface="Cambria Math" panose="02040503050406030204" pitchFamily="18" charset="0"/>
                       </a:rPr>
-                      <m:t>2.15%</m:t>
+                      <m:t>2.15</m:t>
                     </m:r>
                   </m:oMath>
                 </a14:m>
@@ -11475,7 +11491,7 @@
             </p:txBody>
           </p:sp>
         </mc:Choice>
-        <mc:Fallback xmlns="">
+        <mc:Fallback>
           <p:sp>
             <p:nvSpPr>
               <p:cNvPr id="2" name="Subtitle 2">
